--- a/docs/presentation/KSTAR_CES_연구흐름.pptx
+++ b/docs/presentation/KSTAR_CES_연구흐름.pptx
@@ -6444,8 +6444,8 @@
         </p:nvSpPr>
         <p:spPr>
           <a:xfrm>
-            <a:off x="822960" y="3767328"/>
-            <a:ext cx="10515600" cy="1188720"/>
+            <a:off x="822960" y="3712463"/>
+            <a:ext cx="10515600" cy="1572768"/>
           </a:xfrm>
           <a:prstGeom prst="rect">
             <a:avLst/>

--- a/docs/presentation/KSTAR_CES_연구흐름.pptx
+++ b/docs/presentation/KSTAR_CES_연구흐름.pptx
@@ -47571,7 +47571,7 @@
                 </a:solidFill>
                 <a:latin typeface="Malgun Gothic"/>
               </a:rPr>
-              <a:t>모델 — 병목은 용량이 아니라 정보이다</a:t>
+              <a:t>모델 — 라우팅은 설계 선택이 아니라 보존식의 결과이다</a:t>
             </a:r>
           </a:p>
         </p:txBody>
@@ -48216,7 +48216,7 @@
                 </a:solidFill>
                 <a:latin typeface="Malgun Gothic"/>
               </a:rPr>
-              <a:t>프레이밍의 두 함의 · 짝지은 대조군 · 사다리 칸</a:t>
+              <a:t>§4의 골격 (2026-09-03 개정, 7개 소절 · 수식 5개)</a:t>
             </a:r>
           </a:p>
         </p:txBody>
@@ -48261,7 +48261,7 @@
                 </a:solidFill>
                 <a:latin typeface="Malgun Gothic"/>
               </a:rPr>
-              <a:t>① 도달 범위는 세그먼트 전체이다(고정 윈도가 아니다).</a:t>
+              <a:t>4.1 추정 대상·손실·하한: RMSE² = σ_meas² + b², σ_meas 46.4–129.9 eV.</a:t>
             </a:r>
           </a:p>
           <a:p>
@@ -48283,7 +48283,7 @@
                 </a:solidFill>
                 <a:latin typeface="Malgun Gothic"/>
               </a:rPr>
-              <a:t>   §6.3에서 이 모델을 윈도 변형과 가르는 양이며, B.9는 그중</a:t>
+              <a:t>     제곱질량의 46.6%가 상위 1%에 있어 손실은 꼬리 통계이다(§8aq).</a:t>
             </a:r>
           </a:p>
           <a:p>
@@ -48305,7 +48305,7 @@
                 </a:solidFill>
                 <a:latin typeface="Malgun Gothic"/>
               </a:rPr>
-              <a:t>   약 50 ms가 실제로 쓰임을 측정하였다(§6.12 추가 예정).</a:t>
+              <a:t>4.2 두 보존식이 라우팅을 정한다: 각운동량 수지 항별 감사표.</a:t>
             </a:r>
           </a:p>
           <a:p>
@@ -48327,7 +48327,7 @@
                 </a:solidFill>
                 <a:latin typeface="Malgun Gothic"/>
               </a:rPr>
-              <a:t>② 라우팅이 인코더 수준에서 성립한다. 고속 15채널을 전부</a:t>
+              <a:t>     ∇·Π_turb만 미검정이었고 이번에 측정하여 널이다(§8ar).</a:t>
             </a:r>
           </a:p>
           <a:p>
@@ -48349,7 +48349,7 @@
                 </a:solidFill>
                 <a:latin typeface="Malgun Gothic"/>
               </a:rPr>
-              <a:t>   교란해도 V_rot 출력이 비트 단위로 동일하다(§6.7).</a:t>
+              <a:t>4.3 시간 척도: Nyquist 50 Hz · τ_eq 8–59 ms ↔ 문맥 포화 약 50 ms.</a:t>
             </a:r>
           </a:p>
           <a:p>
@@ -48371,7 +48371,7 @@
                 </a:solidFill>
                 <a:latin typeface="Malgun Gothic"/>
               </a:rPr>
-              <a:t>· 윈도 대조군(201,258): 시간 인지 1-D CNN(W=2) + 양방향</a:t>
+              <a:t>     완화 시간 Tᵢ 159 / BES 161 / ECEI 147 ms, V_rot는 측정 불가.</a:t>
             </a:r>
           </a:p>
           <a:p>
@@ -48393,7 +48393,7 @@
                 </a:solidFill>
                 <a:latin typeface="Malgun Gothic"/>
               </a:rPr>
-              <a:t>  GRU(64) + 타깃별 관측 마스킹 어텐션(파라미터 비용 0)이다.</a:t>
+              <a:t>4.4–4.6 백본 · 윈도 대조군(201,258) · b3k8(21,498) — 기존 유지.</a:t>
             </a:r>
           </a:p>
           <a:p>
@@ -48415,7 +48415,7 @@
                 </a:solidFill>
                 <a:latin typeface="Malgun Gothic"/>
               </a:rPr>
-              <a:t>· b3k8(21,498): 헤드를 정확 분해 ŷ = 이월값 + Σ wₖzₖ + b</a:t>
+              <a:t>4.7 최적화: 물려받은 값임을 명시하고 유도로 바꿀 측정을 지목한다</a:t>
             </a:r>
           </a:p>
           <a:p>
@@ -48437,7 +48437,7 @@
                 </a:solidFill>
                 <a:latin typeface="Malgun Gothic"/>
               </a:rPr>
-              <a:t>  로 교체한다(readout 0 초기화 → persistence에서 출발).</a:t>
+              <a:t>     (경사 잡음 척도 · μP).</a:t>
             </a:r>
           </a:p>
         </p:txBody>

--- a/docs/presentation/KSTAR_CES_연구흐름.pptx
+++ b/docs/presentation/KSTAR_CES_연구흐름.pptx
@@ -6605,7 +6605,7 @@
                 </a:solidFill>
                 <a:latin typeface="Malgun Gothic"/>
               </a:rPr>
-              <a:t>서울대학교 · 원자핵공학  |  2026-08-27 기준 (main_ko.tex 2026-08-16판 + B.9 추가 예정 절)</a:t>
+              <a:t>서울대학교 · 원자핵공학  |  2026-09-03 기준 (main_ko.tex: §4 재구성 + §6.12 B.9 반영)</a:t>
             </a:r>
           </a:p>
           <a:p>
@@ -35184,7 +35184,7 @@
                 </a:solidFill>
                 <a:latin typeface="Malgun Gothic"/>
               </a:rPr>
-              <a:t>§6.12 (추가 예정) B.9</a:t>
+              <a:t>§6.12  sec:context</a:t>
             </a:r>
           </a:p>
         </p:txBody>
@@ -35880,7 +35880,7 @@
                 </a:solidFill>
                 <a:latin typeface="Malgun Gothic"/>
               </a:rPr>
-              <a:t>§6.12 (추가 예정)  B.9</a:t>
+              <a:t>§6.12  sec:context</a:t>
             </a:r>
           </a:p>
         </p:txBody>
@@ -35925,7 +35925,7 @@
                 </a:solidFill>
                 <a:latin typeface="Malgun Gothic"/>
               </a:rPr>
-              <a:t>문맥·구조·비용 — 논문에 추가할 절의 골격과 인용할 수치 (§8ac–§8an)</a:t>
+              <a:t>문맥·구조·비용 — 2026-09-03 본문 반영 완료 (§8ac–§8an)</a:t>
             </a:r>
           </a:p>
         </p:txBody>
@@ -41889,7 +41889,7 @@
                 </a:solidFill>
                 <a:latin typeface="Malgun Gothic"/>
               </a:rPr>
-              <a:t>  0.52 → 0.66), 계열은 skill이 아니라 비용을 정한다(추가 예정).</a:t>
+              <a:t>  0.52 → 0.66), 계열은 skill이 아니라 비용을 정한다(§6.12).</a:t>
             </a:r>
           </a:p>
           <a:p>
